--- a/3-Master_Plan/re_entry/HEROs_and_PASSes/slides/PASS_ABC_Gallery_Slides.pptx
+++ b/3-Master_Plan/re_entry/HEROs_and_PASSes/slides/PASS_ABC_Gallery_Slides.pptx
@@ -3138,8 +3138,8 @@
         </p:blipFill>
         <p:spPr>
           <a:xfrm>
-            <a:off x="1228179" y="841248"/>
-            <a:ext cx="9735337" cy="3794761"/>
+            <a:off x="1225449" y="841248"/>
+            <a:ext cx="9740797" cy="3794761"/>
           </a:xfrm>
           <a:prstGeom prst="rect">
             <a:avLst/>
@@ -3862,8 +3862,8 @@
         </p:blipFill>
         <p:spPr>
           <a:xfrm>
-            <a:off x="3146329" y="841248"/>
-            <a:ext cx="5899036" cy="3794760"/>
+            <a:off x="3266718" y="841248"/>
+            <a:ext cx="5658259" cy="3794761"/>
           </a:xfrm>
           <a:prstGeom prst="rect">
             <a:avLst/>
@@ -3878,8 +3878,8 @@
         </p:nvSpPr>
         <p:spPr>
           <a:xfrm>
-            <a:off x="411480" y="4764024"/>
-            <a:ext cx="5570067" cy="1335024"/>
+            <a:off x="411480" y="4764025"/>
+            <a:ext cx="5570067" cy="1335023"/>
           </a:xfrm>
           <a:prstGeom prst="rect">
             <a:avLst/>
@@ -4009,8 +4009,8 @@
         </p:nvSpPr>
         <p:spPr>
           <a:xfrm>
-            <a:off x="6210147" y="4764024"/>
-            <a:ext cx="5570067" cy="1335024"/>
+            <a:off x="6210147" y="4764025"/>
+            <a:ext cx="5570067" cy="1335023"/>
           </a:xfrm>
           <a:prstGeom prst="rect">
             <a:avLst/>

--- a/3-Master_Plan/re_entry/HEROs_and_PASSes/slides/PASS_ABC_Gallery_Slides.pptx
+++ b/3-Master_Plan/re_entry/HEROs_and_PASSes/slides/PASS_ABC_Gallery_Slides.pptx
@@ -3138,8 +3138,8 @@
         </p:blipFill>
         <p:spPr>
           <a:xfrm>
-            <a:off x="1225449" y="841248"/>
-            <a:ext cx="9740797" cy="3794761"/>
+            <a:off x="1145084" y="841248"/>
+            <a:ext cx="9901526" cy="3794761"/>
           </a:xfrm>
           <a:prstGeom prst="rect">
             <a:avLst/>
@@ -3178,7 +3178,7 @@
             </a:pPr>
             <a:r>
               <a:rPr sz="1100"/>
-              <a:t>Real NCAA panel (2011–2021): mean NBA draft rate by ventile.</a:t>
+              <a:t>Real NCAA panel (2011-2021): mean NBA draft rate by ventile.</a:t>
             </a:r>
           </a:p>
           <a:p>
@@ -3216,29 +3216,7 @@
             </a:pPr>
             <a:r>
               <a:rPr sz="1100"/>
-              <a:t>Right — roster context: leave-one-out teammate quality (</a:t>
-            </a:r>
-            <a:r>
-              <a:rPr sz="1100" i="1">
-                <a:latin typeface="Cambria Math"/>
-              </a:rPr>
-              <a:t>poolq\</a:t>
-            </a:r>
-            <a:r>
-              <a:rPr sz="900" i="1" baseline="-25000">
-                <a:latin typeface="Cambria Math"/>
-              </a:rPr>
-              <a:t>l</a:t>
-            </a:r>
-            <a:r>
-              <a:rPr sz="1100" i="1">
-                <a:latin typeface="Cambria Math"/>
-              </a:rPr>
-              <a:t>oo</a:t>
-            </a:r>
-            <a:r>
-              <a:rPr sz="1100"/>
-              <a:t>). Inverted-U.</a:t>
+              <a:t>Right — roster context: middle rise; flat elite tail on POST-QC panel.</a:t>
             </a:r>
           </a:p>
         </p:txBody>
@@ -3285,7 +3263,7 @@
             </a:r>
             <a:r>
               <a:rPr sz="1100"/>
-              <a:t> in the empirical story — stylized fact Pass B/C echo.</a:t>
+              <a:t> in the empirical story — generative Pass B/C show inverted-U in sim.</a:t>
             </a:r>
           </a:p>
           <a:p>
@@ -3862,8 +3840,8 @@
         </p:blipFill>
         <p:spPr>
           <a:xfrm>
-            <a:off x="3266718" y="841248"/>
-            <a:ext cx="5658259" cy="3794761"/>
+            <a:off x="3207153" y="841248"/>
+            <a:ext cx="5777389" cy="3794760"/>
           </a:xfrm>
           <a:prstGeom prst="rect">
             <a:avLst/>
@@ -3878,8 +3856,8 @@
         </p:nvSpPr>
         <p:spPr>
           <a:xfrm>
-            <a:off x="411480" y="4764025"/>
-            <a:ext cx="5570067" cy="1335023"/>
+            <a:off x="411480" y="4764024"/>
+            <a:ext cx="5570067" cy="1335024"/>
           </a:xfrm>
           <a:prstGeom prst="rect">
             <a:avLst/>
@@ -4009,8 +3987,8 @@
         </p:nvSpPr>
         <p:spPr>
           <a:xfrm>
-            <a:off x="6210147" y="4764025"/>
-            <a:ext cx="5570067" cy="1335023"/>
+            <a:off x="6210147" y="4764024"/>
+            <a:ext cx="5570067" cy="1335024"/>
           </a:xfrm>
           <a:prstGeom prst="rect">
             <a:avLst/>
